--- a/MarenzaSantarin_PowerPoint_Presentation.pptx
+++ b/MarenzaSantarin_PowerPoint_Presentation.pptx
@@ -124,6 +124,51 @@
     </p:ext>
   </p:extLst>
 </p:presentation>
+</file>
+
+<file path=ppt/changesInfos/changesInfo1.xml><?xml version="1.0" encoding="utf-8"?>
+<pc:chgInfo xmlns:a="http://schemas.openxmlformats.org/drawingml/2006/main" xmlns:r="http://schemas.openxmlformats.org/officeDocument/2006/relationships" xmlns:ac="http://schemas.microsoft.com/office/drawing/2013/main/command" xmlns:pc="http://schemas.microsoft.com/office/powerpoint/2013/main/command">
+  <pc:docChgLst>
+    <pc:chgData name="marenza santarin" userId="bd1f3d42-2a6b-4ca6-82a8-7bc1d8f8be87" providerId="ADAL" clId="{4DDFC851-11AE-4022-B8AD-58FBEC4C9D49}"/>
+    <pc:docChg chg="modSld">
+      <pc:chgData name="marenza santarin" userId="bd1f3d42-2a6b-4ca6-82a8-7bc1d8f8be87" providerId="ADAL" clId="{4DDFC851-11AE-4022-B8AD-58FBEC4C9D49}" dt="2026-04-30T18:53:25.877" v="9" actId="14100"/>
+      <pc:docMkLst>
+        <pc:docMk/>
+      </pc:docMkLst>
+      <pc:sldChg chg="addSp modSp mod">
+        <pc:chgData name="marenza santarin" userId="bd1f3d42-2a6b-4ca6-82a8-7bc1d8f8be87" providerId="ADAL" clId="{4DDFC851-11AE-4022-B8AD-58FBEC4C9D49}" dt="2026-04-30T18:53:25.877" v="9" actId="14100"/>
+        <pc:sldMkLst>
+          <pc:docMk/>
+          <pc:sldMk cId="2734377931" sldId="267"/>
+        </pc:sldMkLst>
+        <pc:spChg chg="mod">
+          <ac:chgData name="marenza santarin" userId="bd1f3d42-2a6b-4ca6-82a8-7bc1d8f8be87" providerId="ADAL" clId="{4DDFC851-11AE-4022-B8AD-58FBEC4C9D49}" dt="2026-04-30T18:53:08.714" v="3" actId="1076"/>
+          <ac:spMkLst>
+            <pc:docMk/>
+            <pc:sldMk cId="2734377931" sldId="267"/>
+            <ac:spMk id="2" creationId="{A0D80D99-22D0-7D35-26F0-37402E632F51}"/>
+          </ac:spMkLst>
+        </pc:spChg>
+        <pc:spChg chg="mod">
+          <ac:chgData name="marenza santarin" userId="bd1f3d42-2a6b-4ca6-82a8-7bc1d8f8be87" providerId="ADAL" clId="{4DDFC851-11AE-4022-B8AD-58FBEC4C9D49}" dt="2026-04-30T18:53:11.145" v="4" actId="1076"/>
+          <ac:spMkLst>
+            <pc:docMk/>
+            <pc:sldMk cId="2734377931" sldId="267"/>
+            <ac:spMk id="7" creationId="{D7157256-FED8-C804-D57A-85BB06E7D6E3}"/>
+          </ac:spMkLst>
+        </pc:spChg>
+        <pc:picChg chg="add mod">
+          <ac:chgData name="marenza santarin" userId="bd1f3d42-2a6b-4ca6-82a8-7bc1d8f8be87" providerId="ADAL" clId="{4DDFC851-11AE-4022-B8AD-58FBEC4C9D49}" dt="2026-04-30T18:53:25.877" v="9" actId="14100"/>
+          <ac:picMkLst>
+            <pc:docMk/>
+            <pc:sldMk cId="2734377931" sldId="267"/>
+            <ac:picMk id="4" creationId="{B4518A70-3E22-E385-91FC-0CE8B07C0C6B}"/>
+          </ac:picMkLst>
+        </pc:picChg>
+      </pc:sldChg>
+    </pc:docChg>
+  </pc:docChgLst>
+</pc:chgInfo>
 </file>
 
 <file path=ppt/notesMasters/notesMaster1.xml><?xml version="1.0" encoding="utf-8"?>
@@ -7304,7 +7349,12 @@
             <p:ph type="title"/>
           </p:nvPr>
         </p:nvSpPr>
-        <p:spPr/>
+        <p:spPr>
+          <a:xfrm>
+            <a:off x="1026223" y="1420749"/>
+            <a:ext cx="3226689" cy="1188720"/>
+          </a:xfrm>
+        </p:spPr>
         <p:txBody>
           <a:bodyPr/>
           <a:lstStyle/>
@@ -7332,7 +7382,12 @@
             <p:ph idx="1"/>
           </p:nvPr>
         </p:nvSpPr>
-        <p:spPr/>
+        <p:spPr>
+          <a:xfrm>
+            <a:off x="430911" y="2923794"/>
+            <a:ext cx="4417314" cy="505206"/>
+          </a:xfrm>
+        </p:spPr>
         <p:txBody>
           <a:bodyPr/>
           <a:lstStyle/>
@@ -7356,6 +7411,36 @@
           </a:p>
         </p:txBody>
       </p:sp>
+      <p:pic>
+        <p:nvPicPr>
+          <p:cNvPr id="4" name="Picture 3">
+            <a:extLst>
+              <a:ext uri="{FF2B5EF4-FFF2-40B4-BE49-F238E27FC236}">
+                <a16:creationId xmlns:a16="http://schemas.microsoft.com/office/drawing/2014/main" id="{B4518A70-3E22-E385-91FC-0CE8B07C0C6B}"/>
+              </a:ext>
+            </a:extLst>
+          </p:cNvPr>
+          <p:cNvPicPr>
+            <a:picLocks noChangeAspect="1"/>
+          </p:cNvPicPr>
+          <p:nvPr/>
+        </p:nvPicPr>
+        <p:blipFill>
+          <a:blip r:embed="rId4"/>
+          <a:stretch>
+            <a:fillRect/>
+          </a:stretch>
+        </p:blipFill>
+        <p:spPr>
+          <a:xfrm>
+            <a:off x="4965184" y="229845"/>
+            <a:ext cx="6379756" cy="6294768"/>
+          </a:xfrm>
+          <a:prstGeom prst="rect">
+            <a:avLst/>
+          </a:prstGeom>
+        </p:spPr>
+      </p:pic>
     </p:spTree>
     <p:extLst>
       <p:ext uri="{BB962C8B-B14F-4D97-AF65-F5344CB8AC3E}">
